--- a/LLM-T2-001/tests/golden_output/台农芒果采后糖处理实验分析.pptx
+++ b/LLM-T2-001/tests/golden_output/台农芒果采后糖处理实验分析.pptx
@@ -8753,8 +8753,8 @@
         </p:nvSpPr>
         <p:spPr>
           <a:xfrm>
-            <a:off x="548640" y="256032"/>
-            <a:ext cx="457200" cy="411480"/>
+            <a:off x="335280" y="255905"/>
+            <a:ext cx="670560" cy="476885"/>
           </a:xfrm>
           <a:prstGeom prst="rect">
             <a:avLst/>
@@ -8763,11 +8763,11 @@
         </p:spPr>
         <p:txBody>
           <a:bodyPr wrap="square">
-            <a:spAutoFit/>
+            <a:noAutofit/>
           </a:bodyPr>
           <a:lstStyle/>
           <a:p>
-            <a:pPr algn="ctr">
+            <a:pPr algn="r">
               <a:lnSpc>
                 <a:spcPct val="130000"/>
               </a:lnSpc>
@@ -10148,8 +10148,8 @@
         </p:nvSpPr>
         <p:spPr>
           <a:xfrm>
-            <a:off x="548640" y="256032"/>
-            <a:ext cx="457200" cy="450850"/>
+            <a:off x="320040" y="255905"/>
+            <a:ext cx="685800" cy="450850"/>
           </a:xfrm>
           <a:prstGeom prst="rect">
             <a:avLst/>
@@ -10162,7 +10162,7 @@
           </a:bodyPr>
           <a:lstStyle/>
           <a:p>
-            <a:pPr algn="ctr">
+            <a:pPr algn="r">
               <a:lnSpc>
                 <a:spcPct val="130000"/>
               </a:lnSpc>
@@ -10179,7 +10179,13 @@
               </a:rPr>
               <a:t>1</a:t>
             </a:r>
-            <a:endParaRPr>
+            <a:r>
+              <a:rPr lang="en-US">
+                <a:latin typeface="微软雅黑" panose="020B0503020204020204" charset="-122"/>
+              </a:rPr>
+              <a:t>1</a:t>
+            </a:r>
+            <a:endParaRPr lang="en-US">
               <a:latin typeface="微软雅黑" panose="020B0503020204020204" charset="-122"/>
             </a:endParaRPr>
           </a:p>
@@ -11601,8 +11607,8 @@
         </p:nvSpPr>
         <p:spPr>
           <a:xfrm>
-            <a:off x="548640" y="256032"/>
-            <a:ext cx="457200" cy="450850"/>
+            <a:off x="548640" y="255905"/>
+            <a:ext cx="593725" cy="526415"/>
           </a:xfrm>
           <a:prstGeom prst="rect">
             <a:avLst/>
@@ -11611,11 +11617,11 @@
         </p:spPr>
         <p:txBody>
           <a:bodyPr wrap="square">
-            <a:spAutoFit/>
+            <a:noAutofit/>
           </a:bodyPr>
           <a:lstStyle/>
           <a:p>
-            <a:pPr algn="ctr">
+            <a:pPr algn="just">
               <a:lnSpc>
                 <a:spcPct val="130000"/>
               </a:lnSpc>
@@ -11630,7 +11636,7 @@
               <a:rPr lang="en-US">
                 <a:latin typeface="微软雅黑" panose="020B0503020204020204" charset="-122"/>
               </a:rPr>
-              <a:t>1</a:t>
+              <a:t>12</a:t>
             </a:r>
             <a:endParaRPr lang="en-US">
               <a:latin typeface="微软雅黑" panose="020B0503020204020204" charset="-122"/>
@@ -12865,8 +12871,8 @@
         </p:nvSpPr>
         <p:spPr>
           <a:xfrm>
-            <a:off x="548640" y="256032"/>
-            <a:ext cx="457200" cy="450850"/>
+            <a:off x="548640" y="255905"/>
+            <a:ext cx="701040" cy="450850"/>
           </a:xfrm>
           <a:prstGeom prst="rect">
             <a:avLst/>
@@ -12879,7 +12885,7 @@
           </a:bodyPr>
           <a:lstStyle/>
           <a:p>
-            <a:pPr algn="ctr">
+            <a:pPr algn="just">
               <a:lnSpc>
                 <a:spcPct val="130000"/>
               </a:lnSpc>
@@ -12894,7 +12900,7 @@
               <a:rPr lang="en-US">
                 <a:latin typeface="微软雅黑" panose="020B0503020204020204" charset="-122"/>
               </a:rPr>
-              <a:t>2</a:t>
+              <a:t>13</a:t>
             </a:r>
             <a:endParaRPr lang="en-US">
               <a:latin typeface="微软雅黑" panose="020B0503020204020204" charset="-122"/>
@@ -15289,55 +15295,6 @@
                 <a:latin typeface="微软雅黑" panose="020B0503020204020204" charset="-122"/>
               </a:defRPr>
             </a:pPr>
-          </a:p>
-        </p:txBody>
-      </p:sp>
-      <p:sp>
-        <p:nvSpPr>
-          <p:cNvPr id="24" name="TextBox 23"/>
-          <p:cNvSpPr txBox="1"/>
-          <p:nvPr/>
-        </p:nvSpPr>
-        <p:spPr>
-          <a:xfrm>
-            <a:off x="548640" y="6510528"/>
-            <a:ext cx="10972800" cy="320040"/>
-          </a:xfrm>
-          <a:prstGeom prst="rect">
-            <a:avLst/>
-          </a:prstGeom>
-          <a:noFill/>
-        </p:spPr>
-        <p:txBody>
-          <a:bodyPr wrap="square">
-            <a:spAutoFit/>
-          </a:bodyPr>
-          <a:lstStyle/>
-          <a:p>
-            <a:pPr algn="l">
-              <a:lnSpc>
-                <a:spcPct val="130000"/>
-              </a:lnSpc>
-              <a:defRPr sz="800" b="0">
-                <a:solidFill>
-                  <a:srgbClr val="6B6B6B"/>
-                </a:solidFill>
-                <a:latin typeface="微软雅黑" panose="020B0503020204020204" charset="-122"/>
-              </a:defRPr>
-            </a:pPr>
-            <a:r>
-              <a:rPr>
-                <a:latin typeface="微软雅黑" panose="020B0503020204020204" charset="-122"/>
-                <a:ea typeface="微软雅黑" panose="020B0503020204020204" charset="-122"/>
-                <a:cs typeface="微软雅黑" panose="020B0503020204020204" charset="-122"/>
-              </a:rPr>
-              <a:t>实验编号 AG-L3-001-0809  |  台农芒果采后糖处理实验</a:t>
-            </a:r>
-            <a:endParaRPr>
-              <a:latin typeface="微软雅黑" panose="020B0503020204020204" charset="-122"/>
-              <a:ea typeface="微软雅黑" panose="020B0503020204020204" charset="-122"/>
-              <a:cs typeface="微软雅黑" panose="020B0503020204020204" charset="-122"/>
-            </a:endParaRPr>
           </a:p>
         </p:txBody>
       </p:sp>

--- a/LLM-T2-001/tests/golden_output/台农芒果采后糖处理实验分析.pptx
+++ b/LLM-T2-001/tests/golden_output/台农芒果采后糖处理实验分析.pptx
@@ -3989,6 +3989,7 @@
   <p:clrMapOvr>
     <a:masterClrMapping/>
   </p:clrMapOvr>
+  <p:hf hdr="0" ftr="0" dt="0"/>
 </p:sldLayout>
 </file>
 
@@ -4156,6 +4157,7 @@
   <p:clrMapOvr>
     <a:masterClrMapping/>
   </p:clrMapOvr>
+  <p:hf hdr="0" ftr="0" dt="0"/>
 </p:sldLayout>
 </file>
 
@@ -4333,6 +4335,7 @@
   <p:clrMapOvr>
     <a:masterClrMapping/>
   </p:clrMapOvr>
+  <p:hf hdr="0" ftr="0" dt="0"/>
 </p:sldLayout>
 </file>
 
@@ -4500,6 +4503,7 @@
   <p:clrMapOvr>
     <a:masterClrMapping/>
   </p:clrMapOvr>
+  <p:hf hdr="0" ftr="0" dt="0"/>
 </p:sldLayout>
 </file>
 
@@ -4740,6 +4744,7 @@
   <p:clrMapOvr>
     <a:masterClrMapping/>
   </p:clrMapOvr>
+  <p:hf hdr="0" ftr="0" dt="0"/>
 </p:sldLayout>
 </file>
 
@@ -5029,6 +5034,7 @@
   <p:clrMapOvr>
     <a:masterClrMapping/>
   </p:clrMapOvr>
+  <p:hf hdr="0" ftr="0" dt="0"/>
 </p:sldLayout>
 </file>
 
@@ -5454,6 +5460,7 @@
   <p:clrMapOvr>
     <a:masterClrMapping/>
   </p:clrMapOvr>
+  <p:hf hdr="0" ftr="0" dt="0"/>
 </p:sldLayout>
 </file>
 
@@ -5565,6 +5572,7 @@
   <p:clrMapOvr>
     <a:masterClrMapping/>
   </p:clrMapOvr>
+  <p:hf hdr="0" ftr="0" dt="0"/>
 </p:sldLayout>
 </file>
 
@@ -5653,6 +5661,7 @@
   <p:clrMapOvr>
     <a:masterClrMapping/>
   </p:clrMapOvr>
+  <p:hf hdr="0" ftr="0" dt="0"/>
 </p:sldLayout>
 </file>
 
@@ -5928,6 +5937,7 @@
   <p:clrMapOvr>
     <a:masterClrMapping/>
   </p:clrMapOvr>
+  <p:hf hdr="0" ftr="0" dt="0"/>
 </p:sldLayout>
 </file>
 
@@ -6175,6 +6185,7 @@
   <p:clrMapOvr>
     <a:masterClrMapping/>
   </p:clrMapOvr>
+  <p:hf hdr="0" ftr="0" dt="0"/>
 </p:sldLayout>
 </file>
 
@@ -6432,6 +6443,7 @@
     <p:sldLayoutId id="2147483658" r:id="rId10"/>
     <p:sldLayoutId id="2147483659" r:id="rId11"/>
   </p:sldLayoutIdLst>
+  <p:hf hdr="0" ftr="0" dt="0"/>
   <p:txStyles>
     <p:titleStyle>
       <a:lvl1pPr algn="ctr" defTabSz="457200" rtl="0" eaLnBrk="1" latinLnBrk="0" hangingPunct="1">
@@ -7103,6 +7115,83 @@
           </a:p>
         </p:txBody>
       </p:sp>
+      <p:sp>
+        <p:nvSpPr>
+          <p:cNvPr id="23" name="Rectangle 22"/>
+          <p:cNvSpPr/>
+          <p:nvPr/>
+        </p:nvSpPr>
+        <p:spPr>
+          <a:xfrm>
+            <a:off x="0" y="6492240"/>
+            <a:ext cx="12191695" cy="365760"/>
+          </a:xfrm>
+          <a:prstGeom prst="rect">
+            <a:avLst/>
+          </a:prstGeom>
+          <a:solidFill>
+            <a:srgbClr val="F7F7F7"/>
+          </a:solidFill>
+          <a:ln>
+            <a:noFill/>
+          </a:ln>
+          <a:effectLst/>
+        </p:spPr>
+        <p:style>
+          <a:lnRef idx="1">
+            <a:schemeClr val="accent1"/>
+          </a:lnRef>
+          <a:fillRef idx="3">
+            <a:schemeClr val="accent1"/>
+          </a:fillRef>
+          <a:effectRef idx="2">
+            <a:schemeClr val="accent1"/>
+          </a:effectRef>
+          <a:fontRef idx="minor">
+            <a:schemeClr val="lt1"/>
+          </a:fontRef>
+        </p:style>
+        <p:txBody>
+          <a:bodyPr rtlCol="0" anchor="ctr"/>
+          <a:lstStyle/>
+          <a:p>
+            <a:pPr algn="ctr">
+              <a:lnSpc>
+                <a:spcPct val="130000"/>
+              </a:lnSpc>
+              <a:defRPr>
+                <a:latin typeface="微软雅黑" panose="020B0503020204020204" charset="-122"/>
+              </a:defRPr>
+            </a:pPr>
+          </a:p>
+        </p:txBody>
+      </p:sp>
+      <p:sp>
+        <p:nvSpPr>
+          <p:cNvPr id="6" name="灯片编号占位符 5"/>
+          <p:cNvSpPr>
+            <a:spLocks noGrp="1"/>
+          </p:cNvSpPr>
+          <p:nvPr>
+            <p:ph type="sldNum" sz="quarter" idx="12"/>
+          </p:nvPr>
+        </p:nvSpPr>
+        <p:spPr>
+          <a:xfrm>
+            <a:off x="10057765" y="6503035"/>
+            <a:ext cx="2133600" cy="365125"/>
+          </a:xfrm>
+        </p:spPr>
+        <p:txBody>
+          <a:bodyPr/>
+          <a:p>
+            <a:fld id="{C1FF6DA9-008F-8B48-92A6-B652298478BF}" type="slidenum">
+              <a:rPr lang="en-US" smtClean="0"/>
+            </a:fld>
+            <a:endParaRPr lang="en-US"/>
+          </a:p>
+        </p:txBody>
+      </p:sp>
     </p:spTree>
   </p:cSld>
   <p:clrMapOvr>
@@ -8606,6 +8695,32 @@
               <a:ea typeface="微软雅黑" panose="020B0503020204020204" charset="-122"/>
               <a:cs typeface="微软雅黑" panose="020B0503020204020204" charset="-122"/>
             </a:endParaRPr>
+          </a:p>
+        </p:txBody>
+      </p:sp>
+      <p:sp>
+        <p:nvSpPr>
+          <p:cNvPr id="6" name="灯片编号占位符 5"/>
+          <p:cNvSpPr>
+            <a:spLocks noGrp="1"/>
+          </p:cNvSpPr>
+          <p:nvPr>
+            <p:ph type="sldNum" sz="quarter" idx="12"/>
+          </p:nvPr>
+        </p:nvSpPr>
+        <p:spPr>
+          <a:xfrm>
+            <a:off x="10058400" y="6510655"/>
+            <a:ext cx="2133600" cy="365125"/>
+          </a:xfrm>
+        </p:spPr>
+        <p:txBody>
+          <a:bodyPr/>
+          <a:p>
+            <a:fld id="{C1FF6DA9-008F-8B48-92A6-B652298478BF}" type="slidenum">
+              <a:rPr lang="en-US" smtClean="0"/>
+            </a:fld>
+            <a:endParaRPr lang="en-US"/>
           </a:p>
         </p:txBody>
       </p:sp>
@@ -10012,6 +10127,32 @@
           </a:p>
         </p:txBody>
       </p:sp>
+      <p:sp>
+        <p:nvSpPr>
+          <p:cNvPr id="6" name="灯片编号占位符 5"/>
+          <p:cNvSpPr>
+            <a:spLocks noGrp="1"/>
+          </p:cNvSpPr>
+          <p:nvPr>
+            <p:ph type="sldNum" sz="quarter" idx="12"/>
+          </p:nvPr>
+        </p:nvSpPr>
+        <p:spPr>
+          <a:xfrm>
+            <a:off x="10057765" y="6465570"/>
+            <a:ext cx="2133600" cy="365125"/>
+          </a:xfrm>
+        </p:spPr>
+        <p:txBody>
+          <a:bodyPr/>
+          <a:p>
+            <a:fld id="{C1FF6DA9-008F-8B48-92A6-B652298478BF}" type="slidenum">
+              <a:rPr lang="en-US" smtClean="0"/>
+            </a:fld>
+            <a:endParaRPr lang="en-US"/>
+          </a:p>
+        </p:txBody>
+      </p:sp>
     </p:spTree>
   </p:cSld>
   <p:clrMapOvr>
@@ -11468,6 +11609,32 @@
               <a:latin typeface="微软雅黑" panose="020B0503020204020204" charset="-122"/>
               <a:ea typeface="微软雅黑" panose="020B0503020204020204" charset="-122"/>
             </a:endParaRPr>
+          </a:p>
+        </p:txBody>
+      </p:sp>
+      <p:sp>
+        <p:nvSpPr>
+          <p:cNvPr id="6" name="灯片编号占位符 5"/>
+          <p:cNvSpPr>
+            <a:spLocks noGrp="1"/>
+          </p:cNvSpPr>
+          <p:nvPr>
+            <p:ph type="sldNum" sz="quarter" idx="12"/>
+          </p:nvPr>
+        </p:nvSpPr>
+        <p:spPr>
+          <a:xfrm>
+            <a:off x="10057765" y="6492240"/>
+            <a:ext cx="2133600" cy="365125"/>
+          </a:xfrm>
+        </p:spPr>
+        <p:txBody>
+          <a:bodyPr/>
+          <a:p>
+            <a:fld id="{C1FF6DA9-008F-8B48-92A6-B652298478BF}" type="slidenum">
+              <a:rPr lang="en-US" smtClean="0"/>
+            </a:fld>
+            <a:endParaRPr lang="en-US"/>
           </a:p>
         </p:txBody>
       </p:sp>
@@ -11697,8 +11864,8 @@
         </p:nvSpPr>
         <p:spPr>
           <a:xfrm>
-            <a:off x="640080" y="1019175"/>
-            <a:ext cx="10972800" cy="5302885"/>
+            <a:off x="436880" y="914400"/>
+            <a:ext cx="10972800" cy="5813425"/>
           </a:xfrm>
           <a:prstGeom prst="rect">
             <a:avLst/>
@@ -12269,6 +12436,87 @@
               <a:t>芒果采后增甜试验初步研究。安徽农业科学，2009 (2): 817‑818.</a:t>
             </a:r>
             <a:endParaRPr lang="zh-CN" altLang="en-US" sz="900" b="0">
+              <a:solidFill>
+                <a:srgbClr val="6B6B6B"/>
+              </a:solidFill>
+              <a:latin typeface="微软雅黑" panose="020B0503020204020204" charset="-122"/>
+              <a:ea typeface="微软雅黑" panose="020B0503020204020204" charset="-122"/>
+              <a:cs typeface="微软雅黑" panose="020B0503020204020204" charset="-122"/>
+            </a:endParaRPr>
+          </a:p>
+          <a:p>
+            <a:pPr algn="l">
+              <a:lnSpc>
+                <a:spcPct val="130000"/>
+              </a:lnSpc>
+              <a:spcAft>
+                <a:spcPts val="100"/>
+              </a:spcAft>
+              <a:defRPr sz="1000" b="0">
+                <a:solidFill>
+                  <a:srgbClr val="2D2D2D"/>
+                </a:solidFill>
+                <a:latin typeface="微软雅黑" panose="020B0503020204020204" charset="-122"/>
+              </a:defRPr>
+            </a:pPr>
+            <a:r>
+              <a:rPr lang="en-US" altLang="zh-CN" sz="900" b="0">
+                <a:solidFill>
+                  <a:srgbClr val="6B6B6B"/>
+                </a:solidFill>
+                <a:latin typeface="微软雅黑" panose="020B0503020204020204" charset="-122"/>
+                <a:ea typeface="微软雅黑" panose="020B0503020204020204" charset="-122"/>
+                <a:cs typeface="微软雅黑" panose="020B0503020204020204" charset="-122"/>
+              </a:rPr>
+              <a:t>DOI: 10.13989/j.cnki.0517-6611.2009.02.097</a:t>
+            </a:r>
+            <a:endParaRPr lang="en-US" altLang="zh-CN" sz="900" b="0">
+              <a:solidFill>
+                <a:srgbClr val="6B6B6B"/>
+              </a:solidFill>
+              <a:latin typeface="微软雅黑" panose="020B0503020204020204" charset="-122"/>
+              <a:ea typeface="微软雅黑" panose="020B0503020204020204" charset="-122"/>
+              <a:cs typeface="微软雅黑" panose="020B0503020204020204" charset="-122"/>
+            </a:endParaRPr>
+          </a:p>
+          <a:p>
+            <a:pPr algn="l">
+              <a:lnSpc>
+                <a:spcPct val="130000"/>
+              </a:lnSpc>
+              <a:spcAft>
+                <a:spcPts val="100"/>
+              </a:spcAft>
+              <a:defRPr sz="1000" b="0">
+                <a:solidFill>
+                  <a:srgbClr val="2D2D2D"/>
+                </a:solidFill>
+                <a:latin typeface="微软雅黑" panose="020B0503020204020204" charset="-122"/>
+              </a:defRPr>
+            </a:pPr>
+            <a:r>
+              <a:rPr lang="zh-CN" altLang="en-US" sz="900" b="0">
+                <a:solidFill>
+                  <a:srgbClr val="6B6B6B"/>
+                </a:solidFill>
+                <a:latin typeface="微软雅黑" panose="020B0503020204020204" charset="-122"/>
+                <a:ea typeface="微软雅黑" panose="020B0503020204020204" charset="-122"/>
+                <a:cs typeface="微软雅黑" panose="020B0503020204020204" charset="-122"/>
+              </a:rPr>
+              <a:t>链接：</a:t>
+            </a:r>
+            <a:r>
+              <a:rPr lang="en-US" altLang="zh-CN" sz="900" b="0">
+                <a:solidFill>
+                  <a:srgbClr val="6B6B6B"/>
+                </a:solidFill>
+                <a:latin typeface="微软雅黑" panose="020B0503020204020204" charset="-122"/>
+                <a:ea typeface="微软雅黑" panose="020B0503020204020204" charset="-122"/>
+                <a:cs typeface="微软雅黑" panose="020B0503020204020204" charset="-122"/>
+              </a:rPr>
+              <a:t>https://kns.cnki.net/kcms2/article/abstract?v=t3MtpNTmDuxVmLw5Yn5oSKRIE0yIvgZNeePobRfBw8yhgjCz8f27hjTPxm5skvgf-bdKqaJduTUe3Hac9NSxKL4pCpqzi-3i0OlmKIm1kOQs7UnjGiGga9PpXMPE2iyIvkccKakifKBKwcRtG5tYD89to9m3W7bvPZw_9VKppxWf1ZzY1QPHoU2uJgatZ7jmdKvfFtIxpp0=&amp;uniplatform=NZKPT&amp;language=CHS</a:t>
+            </a:r>
+            <a:endParaRPr lang="en-US" altLang="zh-CN" sz="900" b="0">
               <a:solidFill>
                 <a:srgbClr val="6B6B6B"/>
               </a:solidFill>
@@ -12732,6 +12980,32 @@
                 <a:latin typeface="微软雅黑" panose="020B0503020204020204" charset="-122"/>
               </a:defRPr>
             </a:pPr>
+          </a:p>
+        </p:txBody>
+      </p:sp>
+      <p:sp>
+        <p:nvSpPr>
+          <p:cNvPr id="6" name="灯片编号占位符 5"/>
+          <p:cNvSpPr>
+            <a:spLocks noGrp="1"/>
+          </p:cNvSpPr>
+          <p:nvPr>
+            <p:ph type="sldNum" sz="quarter" idx="12"/>
+          </p:nvPr>
+        </p:nvSpPr>
+        <p:spPr>
+          <a:xfrm>
+            <a:off x="10057765" y="6490335"/>
+            <a:ext cx="2133600" cy="365125"/>
+          </a:xfrm>
+        </p:spPr>
+        <p:txBody>
+          <a:bodyPr/>
+          <a:p>
+            <a:fld id="{C1FF6DA9-008F-8B48-92A6-B652298478BF}" type="slidenum">
+              <a:rPr lang="en-US" smtClean="0"/>
+            </a:fld>
+            <a:endParaRPr lang="en-US"/>
           </a:p>
         </p:txBody>
       </p:sp>
@@ -13651,6 +13925,32 @@
           </a:p>
         </p:txBody>
       </p:sp>
+      <p:sp>
+        <p:nvSpPr>
+          <p:cNvPr id="6" name="灯片编号占位符 5"/>
+          <p:cNvSpPr>
+            <a:spLocks noGrp="1"/>
+          </p:cNvSpPr>
+          <p:nvPr>
+            <p:ph type="sldNum" sz="quarter" idx="12"/>
+          </p:nvPr>
+        </p:nvSpPr>
+        <p:spPr>
+          <a:xfrm>
+            <a:off x="10057765" y="6490970"/>
+            <a:ext cx="2133600" cy="365125"/>
+          </a:xfrm>
+        </p:spPr>
+        <p:txBody>
+          <a:bodyPr/>
+          <a:p>
+            <a:fld id="{C1FF6DA9-008F-8B48-92A6-B652298478BF}" type="slidenum">
+              <a:rPr lang="en-US" smtClean="0"/>
+            </a:fld>
+            <a:endParaRPr lang="en-US"/>
+          </a:p>
+        </p:txBody>
+      </p:sp>
     </p:spTree>
   </p:cSld>
   <p:clrMapOvr>
@@ -15295,6 +15595,33 @@
                 <a:latin typeface="微软雅黑" panose="020B0503020204020204" charset="-122"/>
               </a:defRPr>
             </a:pPr>
+            <a:endParaRPr lang="en-US"/>
+          </a:p>
+        </p:txBody>
+      </p:sp>
+      <p:sp>
+        <p:nvSpPr>
+          <p:cNvPr id="6" name="灯片编号占位符 5"/>
+          <p:cNvSpPr>
+            <a:spLocks noGrp="1"/>
+          </p:cNvSpPr>
+          <p:nvPr>
+            <p:ph type="sldNum" sz="quarter" idx="12"/>
+          </p:nvPr>
+        </p:nvSpPr>
+        <p:spPr>
+          <a:xfrm>
+            <a:off x="10058400" y="6490970"/>
+            <a:ext cx="2133600" cy="365125"/>
+          </a:xfrm>
+        </p:spPr>
+        <p:txBody>
+          <a:bodyPr/>
+          <a:p>
+            <a:fld id="{C1FF6DA9-008F-8B48-92A6-B652298478BF}" type="slidenum">
+              <a:rPr lang="en-US" smtClean="0"/>
+            </a:fld>
+            <a:endParaRPr lang="en-US"/>
           </a:p>
         </p:txBody>
       </p:sp>
@@ -18100,7 +18427,7 @@
         <p:spPr>
           <a:xfrm>
             <a:off x="548640" y="6510528"/>
-            <a:ext cx="10972800" cy="320040"/>
+            <a:ext cx="10972800" cy="250825"/>
           </a:xfrm>
           <a:prstGeom prst="rect">
             <a:avLst/>
@@ -18132,11 +18459,45 @@
               </a:rPr>
               <a:t>数据来源：可溶性固形物（TSS）.xlsx  |  均值±SD, n=3</a:t>
             </a:r>
-            <a:endParaRPr>
+            <a:r>
+              <a:rPr lang="zh-CN">
+                <a:latin typeface="微软雅黑" panose="020B0503020204020204" charset="-122"/>
+                <a:ea typeface="微软雅黑" panose="020B0503020204020204" charset="-122"/>
+                <a:cs typeface="微软雅黑" panose="020B0503020204020204" charset="-122"/>
+              </a:rPr>
+              <a:t>，同方差假设</a:t>
+            </a:r>
+            <a:endParaRPr lang="zh-CN">
               <a:latin typeface="微软雅黑" panose="020B0503020204020204" charset="-122"/>
               <a:ea typeface="微软雅黑" panose="020B0503020204020204" charset="-122"/>
               <a:cs typeface="微软雅黑" panose="020B0503020204020204" charset="-122"/>
             </a:endParaRPr>
+          </a:p>
+        </p:txBody>
+      </p:sp>
+      <p:sp>
+        <p:nvSpPr>
+          <p:cNvPr id="6" name="灯片编号占位符 5"/>
+          <p:cNvSpPr>
+            <a:spLocks noGrp="1"/>
+          </p:cNvSpPr>
+          <p:nvPr>
+            <p:ph type="sldNum" sz="quarter" idx="12"/>
+          </p:nvPr>
+        </p:nvSpPr>
+        <p:spPr>
+          <a:xfrm>
+            <a:off x="10057765" y="6492240"/>
+            <a:ext cx="2133600" cy="365125"/>
+          </a:xfrm>
+        </p:spPr>
+        <p:txBody>
+          <a:bodyPr/>
+          <a:p>
+            <a:fld id="{C1FF6DA9-008F-8B48-92A6-B652298478BF}" type="slidenum">
+              <a:rPr lang="en-US" smtClean="0"/>
+            </a:fld>
+            <a:endParaRPr lang="en-US"/>
           </a:p>
         </p:txBody>
       </p:sp>
@@ -21002,6 +21363,32 @@
           </a:p>
         </p:txBody>
       </p:sp>
+      <p:sp>
+        <p:nvSpPr>
+          <p:cNvPr id="6" name="灯片编号占位符 5"/>
+          <p:cNvSpPr>
+            <a:spLocks noGrp="1"/>
+          </p:cNvSpPr>
+          <p:nvPr>
+            <p:ph type="sldNum" sz="quarter" idx="12"/>
+          </p:nvPr>
+        </p:nvSpPr>
+        <p:spPr>
+          <a:xfrm>
+            <a:off x="10057765" y="6510655"/>
+            <a:ext cx="2133600" cy="365125"/>
+          </a:xfrm>
+        </p:spPr>
+        <p:txBody>
+          <a:bodyPr/>
+          <a:p>
+            <a:fld id="{C1FF6DA9-008F-8B48-92A6-B652298478BF}" type="slidenum">
+              <a:rPr lang="en-US" smtClean="0"/>
+            </a:fld>
+            <a:endParaRPr lang="en-US"/>
+          </a:p>
+        </p:txBody>
+      </p:sp>
     </p:spTree>
   </p:cSld>
   <p:clrMapOvr>
@@ -23775,6 +24162,32 @@
               <a:ea typeface="微软雅黑" panose="020B0503020204020204" charset="-122"/>
               <a:cs typeface="微软雅黑" panose="020B0503020204020204" charset="-122"/>
             </a:endParaRPr>
+          </a:p>
+        </p:txBody>
+      </p:sp>
+      <p:sp>
+        <p:nvSpPr>
+          <p:cNvPr id="6" name="灯片编号占位符 5"/>
+          <p:cNvSpPr>
+            <a:spLocks noGrp="1"/>
+          </p:cNvSpPr>
+          <p:nvPr>
+            <p:ph type="sldNum" sz="quarter" idx="12"/>
+          </p:nvPr>
+        </p:nvSpPr>
+        <p:spPr>
+          <a:xfrm>
+            <a:off x="10058400" y="6510655"/>
+            <a:ext cx="2133600" cy="365125"/>
+          </a:xfrm>
+        </p:spPr>
+        <p:txBody>
+          <a:bodyPr/>
+          <a:p>
+            <a:fld id="{C1FF6DA9-008F-8B48-92A6-B652298478BF}" type="slidenum">
+              <a:rPr lang="en-US" smtClean="0"/>
+            </a:fld>
+            <a:endParaRPr lang="en-US"/>
           </a:p>
         </p:txBody>
       </p:sp>
@@ -27341,6 +27754,32 @@
           </a:p>
         </p:txBody>
       </p:sp>
+      <p:sp>
+        <p:nvSpPr>
+          <p:cNvPr id="14" name="灯片编号占位符 13"/>
+          <p:cNvSpPr>
+            <a:spLocks noGrp="1"/>
+          </p:cNvSpPr>
+          <p:nvPr>
+            <p:ph type="sldNum" sz="quarter" idx="12"/>
+          </p:nvPr>
+        </p:nvSpPr>
+        <p:spPr>
+          <a:xfrm>
+            <a:off x="10057765" y="6510655"/>
+            <a:ext cx="2133600" cy="365125"/>
+          </a:xfrm>
+        </p:spPr>
+        <p:txBody>
+          <a:bodyPr/>
+          <a:p>
+            <a:fld id="{C1FF6DA9-008F-8B48-92A6-B652298478BF}" type="slidenum">
+              <a:rPr lang="en-US" smtClean="0"/>
+            </a:fld>
+            <a:endParaRPr lang="en-US"/>
+          </a:p>
+        </p:txBody>
+      </p:sp>
     </p:spTree>
   </p:cSld>
   <p:clrMapOvr>
@@ -28162,6 +28601,32 @@
               <a:ea typeface="微软雅黑" panose="020B0503020204020204" charset="-122"/>
               <a:cs typeface="微软雅黑" panose="020B0503020204020204" charset="-122"/>
             </a:endParaRPr>
+          </a:p>
+        </p:txBody>
+      </p:sp>
+      <p:sp>
+        <p:nvSpPr>
+          <p:cNvPr id="6" name="灯片编号占位符 5"/>
+          <p:cNvSpPr>
+            <a:spLocks noGrp="1"/>
+          </p:cNvSpPr>
+          <p:nvPr>
+            <p:ph type="sldNum" sz="quarter" idx="12"/>
+          </p:nvPr>
+        </p:nvSpPr>
+        <p:spPr>
+          <a:xfrm>
+            <a:off x="10057765" y="6478905"/>
+            <a:ext cx="2133600" cy="365125"/>
+          </a:xfrm>
+        </p:spPr>
+        <p:txBody>
+          <a:bodyPr/>
+          <a:p>
+            <a:fld id="{C1FF6DA9-008F-8B48-92A6-B652298478BF}" type="slidenum">
+              <a:rPr lang="en-US" smtClean="0"/>
+            </a:fld>
+            <a:endParaRPr lang="en-US"/>
           </a:p>
         </p:txBody>
       </p:sp>
@@ -31739,6 +32204,32 @@
           </a:p>
         </p:txBody>
       </p:sp>
+      <p:sp>
+        <p:nvSpPr>
+          <p:cNvPr id="6" name="灯片编号占位符 5"/>
+          <p:cNvSpPr>
+            <a:spLocks noGrp="1"/>
+          </p:cNvSpPr>
+          <p:nvPr>
+            <p:ph type="sldNum" sz="quarter" idx="12"/>
+          </p:nvPr>
+        </p:nvSpPr>
+        <p:spPr>
+          <a:xfrm>
+            <a:off x="10058400" y="6492240"/>
+            <a:ext cx="2133600" cy="365125"/>
+          </a:xfrm>
+        </p:spPr>
+        <p:txBody>
+          <a:bodyPr/>
+          <a:p>
+            <a:fld id="{C1FF6DA9-008F-8B48-92A6-B652298478BF}" type="slidenum">
+              <a:rPr lang="en-US" smtClean="0"/>
+            </a:fld>
+            <a:endParaRPr lang="en-US"/>
+          </a:p>
+        </p:txBody>
+      </p:sp>
     </p:spTree>
   </p:cSld>
   <p:clrMapOvr>
@@ -33176,6 +33667,32 @@
               <a:ea typeface="微软雅黑" panose="020B0503020204020204" charset="-122"/>
               <a:cs typeface="微软雅黑" panose="020B0503020204020204" charset="-122"/>
             </a:endParaRPr>
+          </a:p>
+        </p:txBody>
+      </p:sp>
+      <p:sp>
+        <p:nvSpPr>
+          <p:cNvPr id="6" name="灯片编号占位符 5"/>
+          <p:cNvSpPr>
+            <a:spLocks noGrp="1"/>
+          </p:cNvSpPr>
+          <p:nvPr>
+            <p:ph type="sldNum" sz="quarter" idx="12"/>
+          </p:nvPr>
+        </p:nvSpPr>
+        <p:spPr>
+          <a:xfrm>
+            <a:off x="10057765" y="6490335"/>
+            <a:ext cx="2133600" cy="365125"/>
+          </a:xfrm>
+        </p:spPr>
+        <p:txBody>
+          <a:bodyPr/>
+          <a:p>
+            <a:fld id="{C1FF6DA9-008F-8B48-92A6-B652298478BF}" type="slidenum">
+              <a:rPr lang="en-US" smtClean="0"/>
+            </a:fld>
+            <a:endParaRPr lang="en-US"/>
           </a:p>
         </p:txBody>
       </p:sp>
